--- a/03-Slides/ETHAGT09/ETHAGT09-slides.pptx
+++ b/03-Slides/ETHAGT09/ETHAGT09-slides.pptx
@@ -9942,6 +9942,42 @@
         </p:nvSpPr>
         <p:spPr>
           <a:xfrm>
+            <a:off x="274320" y="6035040"/>
+            <a:ext cx="11612880" cy="320040"/>
+          </a:xfrm>
+          <a:prstGeom prst="rect">
+            <a:avLst/>
+          </a:prstGeom>
+          <a:noFill/>
+        </p:spPr>
+        <p:txBody>
+          <a:bodyPr wrap="square">
+            <a:spAutoFit/>
+          </a:bodyPr>
+          <a:lstStyle/>
+          <a:p>
+            <a:pPr algn="l">
+              <a:defRPr sz="900" b="0">
+                <a:solidFill>
+                  <a:srgbClr val="2980B9"/>
+                </a:solidFill>
+                <a:latin typeface="Segoe UI"/>
+              </a:defRPr>
+            </a:pPr>
+            <a:r>
+              <a:t>LLM = Large Language Model</a:t>
+            </a:r>
+          </a:p>
+        </p:txBody>
+      </p:sp>
+      <p:sp>
+        <p:nvSpPr>
+          <p:cNvPr id="8" name="TextBox 7"/>
+          <p:cNvSpPr txBox="1"/>
+          <p:nvPr/>
+        </p:nvSpPr>
+        <p:spPr>
+          <a:xfrm>
             <a:off x="274320" y="6400800"/>
             <a:ext cx="6400800" cy="365760"/>
           </a:xfrm>
@@ -9969,7 +10005,7 @@
       </p:sp>
       <p:sp>
         <p:nvSpPr>
-          <p:cNvPr id="8" name="TextBox 7"/>
+          <p:cNvPr id="9" name="TextBox 8"/>
           <p:cNvSpPr txBox="1"/>
           <p:nvPr/>
         </p:nvSpPr>
@@ -15452,6 +15488,42 @@
         </p:nvSpPr>
         <p:spPr>
           <a:xfrm>
+            <a:off x="274320" y="6035040"/>
+            <a:ext cx="11612880" cy="320040"/>
+          </a:xfrm>
+          <a:prstGeom prst="rect">
+            <a:avLst/>
+          </a:prstGeom>
+          <a:noFill/>
+        </p:spPr>
+        <p:txBody>
+          <a:bodyPr wrap="square">
+            <a:spAutoFit/>
+          </a:bodyPr>
+          <a:lstStyle/>
+          <a:p>
+            <a:pPr algn="l">
+              <a:defRPr sz="900" b="0">
+                <a:solidFill>
+                  <a:srgbClr val="2980B9"/>
+                </a:solidFill>
+                <a:latin typeface="Segoe UI"/>
+              </a:defRPr>
+            </a:pPr>
+            <a:r>
+              <a:t>SLA = Service Level Agreement</a:t>
+            </a:r>
+          </a:p>
+        </p:txBody>
+      </p:sp>
+      <p:sp>
+        <p:nvSpPr>
+          <p:cNvPr id="11" name="TextBox 10"/>
+          <p:cNvSpPr txBox="1"/>
+          <p:nvPr/>
+        </p:nvSpPr>
+        <p:spPr>
+          <a:xfrm>
             <a:off x="274320" y="6400800"/>
             <a:ext cx="6400800" cy="365760"/>
           </a:xfrm>
@@ -15479,7 +15551,7 @@
       </p:sp>
       <p:sp>
         <p:nvSpPr>
-          <p:cNvPr id="11" name="TextBox 10"/>
+          <p:cNvPr id="12" name="TextBox 11"/>
           <p:cNvSpPr txBox="1"/>
           <p:nvPr/>
         </p:nvSpPr>
@@ -17876,6 +17948,42 @@
         </p:nvSpPr>
         <p:spPr>
           <a:xfrm>
+            <a:off x="274320" y="6035040"/>
+            <a:ext cx="11612880" cy="320040"/>
+          </a:xfrm>
+          <a:prstGeom prst="rect">
+            <a:avLst/>
+          </a:prstGeom>
+          <a:noFill/>
+        </p:spPr>
+        <p:txBody>
+          <a:bodyPr wrap="square">
+            <a:spAutoFit/>
+          </a:bodyPr>
+          <a:lstStyle/>
+          <a:p>
+            <a:pPr algn="l">
+              <a:defRPr sz="900" b="0">
+                <a:solidFill>
+                  <a:srgbClr val="2980B9"/>
+                </a:solidFill>
+                <a:latin typeface="Segoe UI"/>
+              </a:defRPr>
+            </a:pPr>
+            <a:r>
+              <a:t>AgentOps = Agent Operations  ·  MCP = Model Context Protocol</a:t>
+            </a:r>
+          </a:p>
+        </p:txBody>
+      </p:sp>
+      <p:sp>
+        <p:nvSpPr>
+          <p:cNvPr id="8" name="TextBox 7"/>
+          <p:cNvSpPr txBox="1"/>
+          <p:nvPr/>
+        </p:nvSpPr>
+        <p:spPr>
+          <a:xfrm>
             <a:off x="274320" y="6400800"/>
             <a:ext cx="6400800" cy="365760"/>
           </a:xfrm>
@@ -17903,7 +18011,7 @@
       </p:sp>
       <p:sp>
         <p:nvSpPr>
-          <p:cNvPr id="8" name="TextBox 7"/>
+          <p:cNvPr id="9" name="TextBox 8"/>
           <p:cNvSpPr txBox="1"/>
           <p:nvPr/>
         </p:nvSpPr>
@@ -28247,6 +28355,42 @@
         </p:nvSpPr>
         <p:spPr>
           <a:xfrm>
+            <a:off x="274320" y="6035040"/>
+            <a:ext cx="11612880" cy="320040"/>
+          </a:xfrm>
+          <a:prstGeom prst="rect">
+            <a:avLst/>
+          </a:prstGeom>
+          <a:noFill/>
+        </p:spPr>
+        <p:txBody>
+          <a:bodyPr wrap="square">
+            <a:spAutoFit/>
+          </a:bodyPr>
+          <a:lstStyle/>
+          <a:p>
+            <a:pPr algn="l">
+              <a:defRPr sz="900" b="0">
+                <a:solidFill>
+                  <a:srgbClr val="2980B9"/>
+                </a:solidFill>
+                <a:latin typeface="Segoe UI"/>
+              </a:defRPr>
+            </a:pPr>
+            <a:r>
+              <a:t>SSE = Server-Sent Events</a:t>
+            </a:r>
+          </a:p>
+        </p:txBody>
+      </p:sp>
+      <p:sp>
+        <p:nvSpPr>
+          <p:cNvPr id="8" name="TextBox 7"/>
+          <p:cNvSpPr txBox="1"/>
+          <p:nvPr/>
+        </p:nvSpPr>
+        <p:spPr>
+          <a:xfrm>
             <a:off x="274320" y="6400800"/>
             <a:ext cx="6400800" cy="365760"/>
           </a:xfrm>
@@ -28274,7 +28418,7 @@
       </p:sp>
       <p:sp>
         <p:nvSpPr>
-          <p:cNvPr id="8" name="TextBox 7"/>
+          <p:cNvPr id="9" name="TextBox 8"/>
           <p:cNvSpPr txBox="1"/>
           <p:nvPr/>
         </p:nvSpPr>
@@ -29495,6 +29639,42 @@
         </p:nvSpPr>
         <p:spPr>
           <a:xfrm>
+            <a:off x="274320" y="6035040"/>
+            <a:ext cx="11612880" cy="320040"/>
+          </a:xfrm>
+          <a:prstGeom prst="rect">
+            <a:avLst/>
+          </a:prstGeom>
+          <a:noFill/>
+        </p:spPr>
+        <p:txBody>
+          <a:bodyPr wrap="square">
+            <a:spAutoFit/>
+          </a:bodyPr>
+          <a:lstStyle/>
+          <a:p>
+            <a:pPr algn="l">
+              <a:defRPr sz="900" b="0">
+                <a:solidFill>
+                  <a:srgbClr val="2980B9"/>
+                </a:solidFill>
+                <a:latin typeface="Segoe UI"/>
+              </a:defRPr>
+            </a:pPr>
+            <a:r>
+              <a:t>ACL = Agent Communication Language  ·  FIPA = Foundation for Intelligent Physical Agents  ·  KQML = Knowledge Query and Manipulation Language</a:t>
+            </a:r>
+          </a:p>
+        </p:txBody>
+      </p:sp>
+      <p:sp>
+        <p:nvSpPr>
+          <p:cNvPr id="8" name="TextBox 7"/>
+          <p:cNvSpPr txBox="1"/>
+          <p:nvPr/>
+        </p:nvSpPr>
+        <p:spPr>
+          <a:xfrm>
             <a:off x="274320" y="6400800"/>
             <a:ext cx="6400800" cy="365760"/>
           </a:xfrm>
@@ -29522,7 +29702,7 @@
       </p:sp>
       <p:sp>
         <p:nvSpPr>
-          <p:cNvPr id="8" name="TextBox 7"/>
+          <p:cNvPr id="9" name="TextBox 8"/>
           <p:cNvSpPr txBox="1"/>
           <p:nvPr/>
         </p:nvSpPr>
@@ -30264,6 +30444,42 @@
         </p:nvSpPr>
         <p:spPr>
           <a:xfrm>
+            <a:off x="274320" y="6035040"/>
+            <a:ext cx="11612880" cy="320040"/>
+          </a:xfrm>
+          <a:prstGeom prst="rect">
+            <a:avLst/>
+          </a:prstGeom>
+          <a:noFill/>
+        </p:spPr>
+        <p:txBody>
+          <a:bodyPr wrap="square">
+            <a:spAutoFit/>
+          </a:bodyPr>
+          <a:lstStyle/>
+          <a:p>
+            <a:pPr algn="l">
+              <a:defRPr sz="900" b="0">
+                <a:solidFill>
+                  <a:srgbClr val="2980B9"/>
+                </a:solidFill>
+                <a:latin typeface="Segoe UI"/>
+              </a:defRPr>
+            </a:pPr>
+            <a:r>
+              <a:t>ReAct = Reasoning and Acting</a:t>
+            </a:r>
+          </a:p>
+        </p:txBody>
+      </p:sp>
+      <p:sp>
+        <p:nvSpPr>
+          <p:cNvPr id="8" name="TextBox 7"/>
+          <p:cNvSpPr txBox="1"/>
+          <p:nvPr/>
+        </p:nvSpPr>
+        <p:spPr>
+          <a:xfrm>
             <a:off x="274320" y="6400800"/>
             <a:ext cx="6400800" cy="365760"/>
           </a:xfrm>
@@ -30291,7 +30507,7 @@
       </p:sp>
       <p:sp>
         <p:nvSpPr>
-          <p:cNvPr id="8" name="TextBox 7"/>
+          <p:cNvPr id="9" name="TextBox 8"/>
           <p:cNvSpPr txBox="1"/>
           <p:nvPr/>
         </p:nvSpPr>
